--- a/classes/parte-12-osint-e-ingenieria-social/250-osint-de-personas/clase-250-presentacion.pptx
+++ b/classes/parte-12-osint-e-ingenieria-social/250-osint-de-personas/clase-250-presentacion.pptx
@@ -18,6 +18,10 @@
     <p:sldId id="266" r:id="rId17"/>
     <p:sldId id="267" r:id="rId18"/>
     <p:sldId id="268" r:id="rId19"/>
+    <p:sldId id="269" r:id="rId20"/>
+    <p:sldId id="270" r:id="rId21"/>
+    <p:sldId id="271" r:id="rId22"/>
+    <p:sldId id="272" r:id="rId23"/>
   </p:sldIdLst>
   <p:sldSz cx="9144000" cy="6858000" type="screen4x3"/>
   <p:notesSz cx="6858000" cy="9144000"/>
@@ -3199,7 +3203,7 @@
                   <a:srgbClr val="0B3D2E"/>
                 </a:solidFill>
               </a:rPr>
-              <a:t>📝 Reto verificable</a:t>
+              <a:t>🧰 Herramientas y preparación</a:t>
             </a:r>
           </a:p>
         </p:txBody>
@@ -3237,52 +3241,67 @@
                   <a:srgbClr val="22282E"/>
                 </a:solidFill>
               </a:rPr>
-              <a:t>•  Entrega un dossier de auto-OSINT que enlace al menos 3 cuentas tuyas mediante pivoteo, con la</a:t>
-            </a:r>
-          </a:p>
-          <a:p>
-            <a:pPr>
-              <a:spcAft>
-                <a:spcPts val="600"/>
-              </a:spcAft>
-            </a:pPr>
-            <a:r>
-              <a:rPr sz="1500">
-                <a:solidFill>
-                  <a:srgbClr val="22282E"/>
-                </a:solidFill>
-              </a:rPr>
-              <a:t>•  cadena documentada y un nivel de confianza justificado por cada enlace.</a:t>
-            </a:r>
-          </a:p>
-          <a:p>
-            <a:pPr>
-              <a:spcAft>
-                <a:spcPts val="600"/>
-              </a:spcAft>
-            </a:pPr>
-            <a:r>
-              <a:rPr sz="1500">
-                <a:solidFill>
-                  <a:srgbClr val="22282E"/>
-                </a:solidFill>
-              </a:rPr>
-              <a:t>•  Criterio de aceptación: cada enlace es reproducible desde la fuente citada y el dossier incluye</a:t>
-            </a:r>
-          </a:p>
-          <a:p>
-            <a:pPr>
-              <a:spcAft>
-                <a:spcPts val="600"/>
-              </a:spcAft>
-            </a:pPr>
-            <a:r>
-              <a:rPr sz="1500">
-                <a:solidFill>
-                  <a:srgbClr val="22282E"/>
-                </a:solidFill>
-              </a:rPr>
-              <a:t>•  al menos un falso positivo descartado con criterio explícito.</a:t>
+              <a:t>•  VM aislada y sock puppet ya preparados (Clase 249).</a:t>
+            </a:r>
+          </a:p>
+          <a:p>
+            <a:pPr>
+              <a:spcAft>
+                <a:spcPts val="600"/>
+              </a:spcAft>
+            </a:pPr>
+            <a:r>
+              <a:rPr sz="1500">
+                <a:solidFill>
+                  <a:srgbClr val="22282E"/>
+                </a:solidFill>
+              </a:rPr>
+              <a:t>•  Búsqueda de usuarios: sherlock, maigret, whatsmyname. Instalación: pipx install maigret.</a:t>
+            </a:r>
+          </a:p>
+          <a:p>
+            <a:pPr>
+              <a:spcAft>
+                <a:spcPts val="600"/>
+              </a:spcAft>
+            </a:pPr>
+            <a:r>
+              <a:rPr sz="1500">
+                <a:solidFill>
+                  <a:srgbClr val="22282E"/>
+                </a:solidFill>
+              </a:rPr>
+              <a:t>•  Correos: Have I Been Pwned, Holehe (pipx install holehe), Hunter.io (con moderación).</a:t>
+            </a:r>
+          </a:p>
+          <a:p>
+            <a:pPr>
+              <a:spcAft>
+                <a:spcPts val="600"/>
+              </a:spcAft>
+            </a:pPr>
+            <a:r>
+              <a:rPr sz="1500">
+                <a:solidFill>
+                  <a:srgbClr val="22282E"/>
+                </a:solidFill>
+              </a:rPr>
+              <a:t>•  Buscadores de personas: solo de acceso público y legal según jurisdicción; documenta la fuente.</a:t>
+            </a:r>
+          </a:p>
+          <a:p>
+            <a:pPr>
+              <a:spcAft>
+                <a:spcPts val="600"/>
+              </a:spcAft>
+            </a:pPr>
+            <a:r>
+              <a:rPr sz="1500">
+                <a:solidFill>
+                  <a:srgbClr val="22282E"/>
+                </a:solidFill>
+              </a:rPr>
+              <a:t>•  Recordatorio: ejecuta cada herramienta contra tu propio identificador o el autorizado.</a:t>
             </a:r>
           </a:p>
         </p:txBody>
@@ -3333,7 +3352,7 @@
                   <a:srgbClr val="0B3D2E"/>
                 </a:solidFill>
               </a:rPr>
-              <a:t>⚠️ Errores comunes</a:t>
+              <a:t>🧪 Laboratorio guiado</a:t>
             </a:r>
           </a:p>
         </p:txBody>
@@ -3371,67 +3390,97 @@
                   <a:srgbClr val="22282E"/>
                 </a:solidFill>
               </a:rPr>
-              <a:t>•  Muchos perfiles falsos en Sherlock — La herramienta reporta 404 como match. Verifica cada uno manualmente.</a:t>
-            </a:r>
-          </a:p>
-          <a:p>
-            <a:pPr>
-              <a:spcAft>
-                <a:spcPts val="600"/>
-              </a:spcAft>
-            </a:pPr>
-            <a:r>
-              <a:rPr sz="1500">
-                <a:solidFill>
-                  <a:srgbClr val="22282E"/>
-                </a:solidFill>
-              </a:rPr>
-              <a:t>•  Atribuir datos a la persona equivocada — Homónimo. Cruza con foto, ciudad o fecha antes de concluir.</a:t>
-            </a:r>
-          </a:p>
-          <a:p>
-            <a:pPr>
-              <a:spcAft>
-                <a:spcPts val="600"/>
-              </a:spcAft>
-            </a:pPr>
-            <a:r>
-              <a:rPr sz="1500">
-                <a:solidFill>
-                  <a:srgbClr val="22282E"/>
-                </a:solidFill>
-              </a:rPr>
-              <a:t>•  Rate limit / bloqueo — Consultas masivas desde la misma IP. Espacia peticiones o usa la VM/VPN del alcance.</a:t>
-            </a:r>
-          </a:p>
-          <a:p>
-            <a:pPr>
-              <a:spcAft>
-                <a:spcPts val="600"/>
-              </a:spcAft>
-            </a:pPr>
-            <a:r>
-              <a:rPr sz="1500">
-                <a:solidFill>
-                  <a:srgbClr val="22282E"/>
-                </a:solidFill>
-              </a:rPr>
-              <a:t>•  Correo "no encontrado" pero existe — El servicio oculta la enumeración. Prueba otro método pasivo.</a:t>
-            </a:r>
-          </a:p>
-          <a:p>
-            <a:pPr>
-              <a:spcAft>
-                <a:spcPts val="600"/>
-              </a:spcAft>
-            </a:pPr>
-            <a:r>
-              <a:rPr sz="1500">
-                <a:solidFill>
-                  <a:srgbClr val="22282E"/>
-                </a:solidFill>
-              </a:rPr>
-              <a:t>•  Usar leaks robados como prueba — Fuente ilícita. Úsalos solo para patrones y según lo permita el engagement.</a:t>
+              <a:t>•  Objetivo: tu propio identificador (o el de un compañero que consienta).</a:t>
+            </a:r>
+          </a:p>
+          <a:p>
+            <a:pPr>
+              <a:spcAft>
+                <a:spcPts val="600"/>
+              </a:spcAft>
+            </a:pPr>
+            <a:r>
+              <a:rPr sz="1500">
+                <a:solidFill>
+                  <a:srgbClr val="22282E"/>
+                </a:solidFill>
+              </a:rPr>
+              <a:t>•  Anota tus identificadores de prueba: nombre, un correo dedicado, un alias.</a:t>
+            </a:r>
+          </a:p>
+          <a:p>
+            <a:pPr>
+              <a:spcAft>
+                <a:spcPts val="600"/>
+              </a:spcAft>
+            </a:pPr>
+            <a:r>
+              <a:rPr sz="1500">
+                <a:solidFill>
+                  <a:srgbClr val="22282E"/>
+                </a:solidFill>
+              </a:rPr>
+              <a:t>•  Busca el alias en múltiples plataformas: sherlock tualias y maigret tualias. Registra coincidencias reales vs. falsos positivos.</a:t>
+            </a:r>
+          </a:p>
+          <a:p>
+            <a:pPr>
+              <a:spcAft>
+                <a:spcPts val="600"/>
+              </a:spcAft>
+            </a:pPr>
+            <a:r>
+              <a:rPr sz="1500">
+                <a:solidFill>
+                  <a:srgbClr val="22282E"/>
+                </a:solidFill>
+              </a:rPr>
+              <a:t>•  Comprueba en qué servicios está registrado un correo: holehe correo@example.com.</a:t>
+            </a:r>
+          </a:p>
+          <a:p>
+            <a:pPr>
+              <a:spcAft>
+                <a:spcPts val="600"/>
+              </a:spcAft>
+            </a:pPr>
+            <a:r>
+              <a:rPr sz="1500">
+                <a:solidFill>
+                  <a:srgbClr val="22282E"/>
+                </a:solidFill>
+              </a:rPr>
+              <a:t>•  Consulta brechas asociadas al correo en Have I Been Pwned y anota qué datos se filtraron.</a:t>
+            </a:r>
+          </a:p>
+          <a:p>
+            <a:pPr>
+              <a:spcAft>
+                <a:spcPts val="600"/>
+              </a:spcAft>
+            </a:pPr>
+            <a:r>
+              <a:rPr sz="1500">
+                <a:solidFill>
+                  <a:srgbClr val="22282E"/>
+                </a:solidFill>
+              </a:rPr>
+              <a:t>•  Pivota: si un perfil revela una web personal, extrae de ella nuevos correos o alias y repite.</a:t>
+            </a:r>
+          </a:p>
+          <a:p>
+            <a:pPr>
+              <a:spcAft>
+                <a:spcPts val="600"/>
+              </a:spcAft>
+            </a:pPr>
+            <a:r>
+              <a:rPr sz="1500">
+                <a:solidFill>
+                  <a:srgbClr val="22282E"/>
+                </a:solidFill>
+              </a:rPr>
+              <a:t>•  Construye una tabla de correlación (dato, fuente, confianza, verificado sí/no).</a:t>
             </a:r>
           </a:p>
         </p:txBody>
@@ -3482,7 +3531,7 @@
                   <a:srgbClr val="0B3D2E"/>
                 </a:solidFill>
               </a:rPr>
-              <a:t>❓ Preguntas frecuentes</a:t>
+              <a:t>✍️ Ejercicios</a:t>
             </a:r>
           </a:p>
         </p:txBody>
@@ -3520,97 +3569,82 @@
                   <a:srgbClr val="22282E"/>
                 </a:solidFill>
               </a:rPr>
-              <a:t>•  ❓ ¿Puedo perfilar a cualquiera con estas herramientas?</a:t>
-            </a:r>
-          </a:p>
-          <a:p>
-            <a:pPr>
-              <a:spcAft>
-                <a:spcPts val="600"/>
-              </a:spcAft>
-            </a:pPr>
-            <a:r>
-              <a:rPr sz="1500">
-                <a:solidFill>
-                  <a:srgbClr val="22282E"/>
-                </a:solidFill>
-              </a:rPr>
-              <a:t>•  Técnicamente sí, legal y éticamente no. Solo sobre ti, con consentimiento o con autorización escrita</a:t>
-            </a:r>
-          </a:p>
-          <a:p>
-            <a:pPr>
-              <a:spcAft>
-                <a:spcPts val="600"/>
-              </a:spcAft>
-            </a:pPr>
-            <a:r>
-              <a:rPr sz="1500">
-                <a:solidFill>
-                  <a:srgbClr val="22282E"/>
-                </a:solidFill>
-              </a:rPr>
-              <a:t>•  en un engagement.</a:t>
-            </a:r>
-          </a:p>
-          <a:p>
-            <a:pPr>
-              <a:spcAft>
-                <a:spcPts val="600"/>
-              </a:spcAft>
-            </a:pPr>
-            <a:r>
-              <a:rPr sz="1500">
-                <a:solidFill>
-                  <a:srgbClr val="22282E"/>
-                </a:solidFill>
-              </a:rPr>
-              <a:t>•  ❓ ¿Un match de username es prueba definitiva?</a:t>
-            </a:r>
-          </a:p>
-          <a:p>
-            <a:pPr>
-              <a:spcAft>
-                <a:spcPts val="600"/>
-              </a:spcAft>
-            </a:pPr>
-            <a:r>
-              <a:rPr sz="1500">
-                <a:solidFill>
-                  <a:srgbClr val="22282E"/>
-                </a:solidFill>
-              </a:rPr>
-              <a:t>•  No. Es un indicio. Necesitas corroboración cruzada (foto, biografía, enlaces) para elevar la confianza.</a:t>
-            </a:r>
-          </a:p>
-          <a:p>
-            <a:pPr>
-              <a:spcAft>
-                <a:spcPts val="600"/>
-              </a:spcAft>
-            </a:pPr>
-            <a:r>
-              <a:rPr sz="1500">
-                <a:solidFill>
-                  <a:srgbClr val="22282E"/>
-                </a:solidFill>
-              </a:rPr>
-              <a:t>•  ❓ ¿Qué hago si encuentro datos muy sensibles de mí?</a:t>
-            </a:r>
-          </a:p>
-          <a:p>
-            <a:pPr>
-              <a:spcAft>
-                <a:spcPts val="600"/>
-              </a:spcAft>
-            </a:pPr>
-            <a:r>
-              <a:rPr sz="1500">
-                <a:solidFill>
-                  <a:srgbClr val="22282E"/>
-                </a:solidFill>
-              </a:rPr>
-              <a:t>•  Documenta, reduce tu exposición (elimina cuentas, cambia contraseñas, activa 2FA) y considera</a:t>
+              <a:t>•  Ejecuta sherlock y maigret sobre el mismo alias y compara falsos positivos.</a:t>
+            </a:r>
+          </a:p>
+          <a:p>
+            <a:pPr>
+              <a:spcAft>
+                <a:spcPts val="600"/>
+              </a:spcAft>
+            </a:pPr>
+            <a:r>
+              <a:rPr sz="1500">
+                <a:solidFill>
+                  <a:srgbClr val="22282E"/>
+                </a:solidFill>
+              </a:rPr>
+              <a:t>•  Explica por qué un "match" de usuario no prueba que sea la misma persona.</a:t>
+            </a:r>
+          </a:p>
+          <a:p>
+            <a:pPr>
+              <a:spcAft>
+                <a:spcPts val="600"/>
+              </a:spcAft>
+            </a:pPr>
+            <a:r>
+              <a:rPr sz="1500">
+                <a:solidFill>
+                  <a:srgbClr val="22282E"/>
+                </a:solidFill>
+              </a:rPr>
+              <a:t>•  Documenta una cadena de pivoteo de al menos 3 saltos (correo → perfil → web → correo nuevo).</a:t>
+            </a:r>
+          </a:p>
+          <a:p>
+            <a:pPr>
+              <a:spcAft>
+                <a:spcPts val="600"/>
+              </a:spcAft>
+            </a:pPr>
+            <a:r>
+              <a:rPr sz="1500">
+                <a:solidFill>
+                  <a:srgbClr val="22282E"/>
+                </a:solidFill>
+              </a:rPr>
+              <a:t>•  Analiza una brecha propia en HIBP y deriva 3 recomendaciones de higiene de credenciales.</a:t>
+            </a:r>
+          </a:p>
+          <a:p>
+            <a:pPr>
+              <a:spcAft>
+                <a:spcPts val="600"/>
+              </a:spcAft>
+            </a:pPr>
+            <a:r>
+              <a:rPr sz="1500">
+                <a:solidFill>
+                  <a:srgbClr val="22282E"/>
+                </a:solidFill>
+              </a:rPr>
+              <a:t>•  Diseña criterios objetivos para descartar homónimos.</a:t>
+            </a:r>
+          </a:p>
+          <a:p>
+            <a:pPr>
+              <a:spcAft>
+                <a:spcPts val="600"/>
+              </a:spcAft>
+            </a:pPr>
+            <a:r>
+              <a:rPr sz="1500">
+                <a:solidFill>
+                  <a:srgbClr val="22282E"/>
+                </a:solidFill>
+              </a:rPr>
+              <a:t>•  Investiga la diferencia legal entre OSINT autorizado y doxing en tu país.</a:t>
             </a:r>
           </a:p>
         </p:txBody>
@@ -3661,7 +3695,7 @@
                   <a:srgbClr val="0B3D2E"/>
                 </a:solidFill>
               </a:rPr>
-              <a:t>🔗 Referencias</a:t>
+              <a:t>📝 Reto verificable</a:t>
             </a:r>
           </a:p>
         </p:txBody>
@@ -3699,6 +3733,468 @@
                   <a:srgbClr val="22282E"/>
                 </a:solidFill>
               </a:rPr>
+              <a:t>•  Entrega un dossier de auto-OSINT que enlace al menos 3 cuentas tuyas mediante pivoteo, con la</a:t>
+            </a:r>
+          </a:p>
+          <a:p>
+            <a:pPr>
+              <a:spcAft>
+                <a:spcPts val="600"/>
+              </a:spcAft>
+            </a:pPr>
+            <a:r>
+              <a:rPr sz="1500">
+                <a:solidFill>
+                  <a:srgbClr val="22282E"/>
+                </a:solidFill>
+              </a:rPr>
+              <a:t>•  cadena documentada y un nivel de confianza justificado por cada enlace.</a:t>
+            </a:r>
+          </a:p>
+          <a:p>
+            <a:pPr>
+              <a:spcAft>
+                <a:spcPts val="600"/>
+              </a:spcAft>
+            </a:pPr>
+            <a:r>
+              <a:rPr sz="1500">
+                <a:solidFill>
+                  <a:srgbClr val="22282E"/>
+                </a:solidFill>
+              </a:rPr>
+              <a:t>•  Criterio de aceptación: cada enlace es reproducible desde la fuente citada y el dossier incluye</a:t>
+            </a:r>
+          </a:p>
+          <a:p>
+            <a:pPr>
+              <a:spcAft>
+                <a:spcPts val="600"/>
+              </a:spcAft>
+            </a:pPr>
+            <a:r>
+              <a:rPr sz="1500">
+                <a:solidFill>
+                  <a:srgbClr val="22282E"/>
+                </a:solidFill>
+              </a:rPr>
+              <a:t>•  al menos un falso positivo descartado con criterio explícito.</a:t>
+            </a:r>
+          </a:p>
+        </p:txBody>
+      </p:sp>
+    </p:spTree>
+  </p:cSld>
+  <p:clrMapOvr>
+    <a:masterClrMapping/>
+  </p:clrMapOvr>
+</p:sld>
+</file>
+
+<file path=ppt/slides/slide14.xml><?xml version="1.0" encoding="utf-8"?>
+<p:sld xmlns:a="http://schemas.openxmlformats.org/drawingml/2006/main" xmlns:p="http://schemas.openxmlformats.org/presentationml/2006/main" xmlns:r="http://schemas.openxmlformats.org/officeDocument/2006/relationships">
+  <p:cSld>
+    <p:spTree>
+      <p:nvGrpSpPr>
+        <p:cNvPr id="1" name=""/>
+        <p:cNvGrpSpPr/>
+        <p:nvPr/>
+      </p:nvGrpSpPr>
+      <p:grpSpPr/>
+      <p:sp>
+        <p:nvSpPr>
+          <p:cNvPr id="2" name="TextBox 1"/>
+          <p:cNvSpPr txBox="1"/>
+          <p:nvPr/>
+        </p:nvSpPr>
+        <p:spPr>
+          <a:xfrm>
+            <a:off x="457200" y="320040"/>
+            <a:ext cx="8229600" cy="822960"/>
+          </a:xfrm>
+          <a:prstGeom prst="rect">
+            <a:avLst/>
+          </a:prstGeom>
+          <a:noFill/>
+        </p:spPr>
+        <p:txBody>
+          <a:bodyPr wrap="square">
+            <a:spAutoFit/>
+          </a:bodyPr>
+          <a:lstStyle/>
+          <a:p>
+            <a:r>
+              <a:rPr sz="2600" b="1">
+                <a:solidFill>
+                  <a:srgbClr val="0B3D2E"/>
+                </a:solidFill>
+              </a:rPr>
+              <a:t>⚠️ Errores comunes</a:t>
+            </a:r>
+          </a:p>
+        </p:txBody>
+      </p:sp>
+      <p:sp>
+        <p:nvSpPr>
+          <p:cNvPr id="3" name="TextBox 2"/>
+          <p:cNvSpPr txBox="1"/>
+          <p:nvPr/>
+        </p:nvSpPr>
+        <p:spPr>
+          <a:xfrm>
+            <a:off x="457200" y="1280160"/>
+            <a:ext cx="8229600" cy="4937760"/>
+          </a:xfrm>
+          <a:prstGeom prst="rect">
+            <a:avLst/>
+          </a:prstGeom>
+          <a:noFill/>
+        </p:spPr>
+        <p:txBody>
+          <a:bodyPr wrap="square">
+            <a:spAutoFit/>
+          </a:bodyPr>
+          <a:lstStyle/>
+          <a:p>
+            <a:pPr>
+              <a:spcAft>
+                <a:spcPts val="600"/>
+              </a:spcAft>
+            </a:pPr>
+            <a:r>
+              <a:rPr sz="1500">
+                <a:solidFill>
+                  <a:srgbClr val="22282E"/>
+                </a:solidFill>
+              </a:rPr>
+              <a:t>•  Muchos perfiles falsos en Sherlock — La herramienta reporta 404 como match. Verifica cada uno manualmente.</a:t>
+            </a:r>
+          </a:p>
+          <a:p>
+            <a:pPr>
+              <a:spcAft>
+                <a:spcPts val="600"/>
+              </a:spcAft>
+            </a:pPr>
+            <a:r>
+              <a:rPr sz="1500">
+                <a:solidFill>
+                  <a:srgbClr val="22282E"/>
+                </a:solidFill>
+              </a:rPr>
+              <a:t>•  Atribuir datos a la persona equivocada — Homónimo. Cruza con foto, ciudad o fecha antes de concluir.</a:t>
+            </a:r>
+          </a:p>
+          <a:p>
+            <a:pPr>
+              <a:spcAft>
+                <a:spcPts val="600"/>
+              </a:spcAft>
+            </a:pPr>
+            <a:r>
+              <a:rPr sz="1500">
+                <a:solidFill>
+                  <a:srgbClr val="22282E"/>
+                </a:solidFill>
+              </a:rPr>
+              <a:t>•  Rate limit / bloqueo — Consultas masivas desde la misma IP. Espacia peticiones o usa la VM/VPN del alcance.</a:t>
+            </a:r>
+          </a:p>
+          <a:p>
+            <a:pPr>
+              <a:spcAft>
+                <a:spcPts val="600"/>
+              </a:spcAft>
+            </a:pPr>
+            <a:r>
+              <a:rPr sz="1500">
+                <a:solidFill>
+                  <a:srgbClr val="22282E"/>
+                </a:solidFill>
+              </a:rPr>
+              <a:t>•  Correo "no encontrado" pero existe — El servicio oculta la enumeración. Prueba otro método pasivo.</a:t>
+            </a:r>
+          </a:p>
+          <a:p>
+            <a:pPr>
+              <a:spcAft>
+                <a:spcPts val="600"/>
+              </a:spcAft>
+            </a:pPr>
+            <a:r>
+              <a:rPr sz="1500">
+                <a:solidFill>
+                  <a:srgbClr val="22282E"/>
+                </a:solidFill>
+              </a:rPr>
+              <a:t>•  Usar leaks robados como prueba — Fuente ilícita. Úsalos solo para patrones y según lo permita el engagement.</a:t>
+            </a:r>
+          </a:p>
+        </p:txBody>
+      </p:sp>
+    </p:spTree>
+  </p:cSld>
+  <p:clrMapOvr>
+    <a:masterClrMapping/>
+  </p:clrMapOvr>
+</p:sld>
+</file>
+
+<file path=ppt/slides/slide15.xml><?xml version="1.0" encoding="utf-8"?>
+<p:sld xmlns:a="http://schemas.openxmlformats.org/drawingml/2006/main" xmlns:p="http://schemas.openxmlformats.org/presentationml/2006/main" xmlns:r="http://schemas.openxmlformats.org/officeDocument/2006/relationships">
+  <p:cSld>
+    <p:spTree>
+      <p:nvGrpSpPr>
+        <p:cNvPr id="1" name=""/>
+        <p:cNvGrpSpPr/>
+        <p:nvPr/>
+      </p:nvGrpSpPr>
+      <p:grpSpPr/>
+      <p:sp>
+        <p:nvSpPr>
+          <p:cNvPr id="2" name="TextBox 1"/>
+          <p:cNvSpPr txBox="1"/>
+          <p:nvPr/>
+        </p:nvSpPr>
+        <p:spPr>
+          <a:xfrm>
+            <a:off x="457200" y="320040"/>
+            <a:ext cx="8229600" cy="822960"/>
+          </a:xfrm>
+          <a:prstGeom prst="rect">
+            <a:avLst/>
+          </a:prstGeom>
+          <a:noFill/>
+        </p:spPr>
+        <p:txBody>
+          <a:bodyPr wrap="square">
+            <a:spAutoFit/>
+          </a:bodyPr>
+          <a:lstStyle/>
+          <a:p>
+            <a:r>
+              <a:rPr sz="2600" b="1">
+                <a:solidFill>
+                  <a:srgbClr val="0B3D2E"/>
+                </a:solidFill>
+              </a:rPr>
+              <a:t>❓ Preguntas frecuentes</a:t>
+            </a:r>
+          </a:p>
+        </p:txBody>
+      </p:sp>
+      <p:sp>
+        <p:nvSpPr>
+          <p:cNvPr id="3" name="TextBox 2"/>
+          <p:cNvSpPr txBox="1"/>
+          <p:nvPr/>
+        </p:nvSpPr>
+        <p:spPr>
+          <a:xfrm>
+            <a:off x="457200" y="1280160"/>
+            <a:ext cx="8229600" cy="4937760"/>
+          </a:xfrm>
+          <a:prstGeom prst="rect">
+            <a:avLst/>
+          </a:prstGeom>
+          <a:noFill/>
+        </p:spPr>
+        <p:txBody>
+          <a:bodyPr wrap="square">
+            <a:spAutoFit/>
+          </a:bodyPr>
+          <a:lstStyle/>
+          <a:p>
+            <a:pPr>
+              <a:spcAft>
+                <a:spcPts val="600"/>
+              </a:spcAft>
+            </a:pPr>
+            <a:r>
+              <a:rPr sz="1500">
+                <a:solidFill>
+                  <a:srgbClr val="22282E"/>
+                </a:solidFill>
+              </a:rPr>
+              <a:t>•  ❓ ¿Puedo perfilar a cualquiera con estas herramientas?</a:t>
+            </a:r>
+          </a:p>
+          <a:p>
+            <a:pPr>
+              <a:spcAft>
+                <a:spcPts val="600"/>
+              </a:spcAft>
+            </a:pPr>
+            <a:r>
+              <a:rPr sz="1500">
+                <a:solidFill>
+                  <a:srgbClr val="22282E"/>
+                </a:solidFill>
+              </a:rPr>
+              <a:t>•  Técnicamente sí, legal y éticamente no. Solo sobre ti, con consentimiento o con autorización escrita</a:t>
+            </a:r>
+          </a:p>
+          <a:p>
+            <a:pPr>
+              <a:spcAft>
+                <a:spcPts val="600"/>
+              </a:spcAft>
+            </a:pPr>
+            <a:r>
+              <a:rPr sz="1500">
+                <a:solidFill>
+                  <a:srgbClr val="22282E"/>
+                </a:solidFill>
+              </a:rPr>
+              <a:t>•  en un engagement.</a:t>
+            </a:r>
+          </a:p>
+          <a:p>
+            <a:pPr>
+              <a:spcAft>
+                <a:spcPts val="600"/>
+              </a:spcAft>
+            </a:pPr>
+            <a:r>
+              <a:rPr sz="1500">
+                <a:solidFill>
+                  <a:srgbClr val="22282E"/>
+                </a:solidFill>
+              </a:rPr>
+              <a:t>•  ❓ ¿Un match de username es prueba definitiva?</a:t>
+            </a:r>
+          </a:p>
+          <a:p>
+            <a:pPr>
+              <a:spcAft>
+                <a:spcPts val="600"/>
+              </a:spcAft>
+            </a:pPr>
+            <a:r>
+              <a:rPr sz="1500">
+                <a:solidFill>
+                  <a:srgbClr val="22282E"/>
+                </a:solidFill>
+              </a:rPr>
+              <a:t>•  No. Es un indicio. Necesitas corroboración cruzada (foto, biografía, enlaces) para elevar la confianza.</a:t>
+            </a:r>
+          </a:p>
+          <a:p>
+            <a:pPr>
+              <a:spcAft>
+                <a:spcPts val="600"/>
+              </a:spcAft>
+            </a:pPr>
+            <a:r>
+              <a:rPr sz="1500">
+                <a:solidFill>
+                  <a:srgbClr val="22282E"/>
+                </a:solidFill>
+              </a:rPr>
+              <a:t>•  ❓ ¿Qué hago si encuentro datos muy sensibles de mí?</a:t>
+            </a:r>
+          </a:p>
+          <a:p>
+            <a:pPr>
+              <a:spcAft>
+                <a:spcPts val="600"/>
+              </a:spcAft>
+            </a:pPr>
+            <a:r>
+              <a:rPr sz="1500">
+                <a:solidFill>
+                  <a:srgbClr val="22282E"/>
+                </a:solidFill>
+              </a:rPr>
+              <a:t>•  Documenta, reduce tu exposición (elimina cuentas, cambia contraseñas, activa 2FA) y considera</a:t>
+            </a:r>
+          </a:p>
+        </p:txBody>
+      </p:sp>
+    </p:spTree>
+  </p:cSld>
+  <p:clrMapOvr>
+    <a:masterClrMapping/>
+  </p:clrMapOvr>
+</p:sld>
+</file>
+
+<file path=ppt/slides/slide16.xml><?xml version="1.0" encoding="utf-8"?>
+<p:sld xmlns:a="http://schemas.openxmlformats.org/drawingml/2006/main" xmlns:p="http://schemas.openxmlformats.org/presentationml/2006/main" xmlns:r="http://schemas.openxmlformats.org/officeDocument/2006/relationships">
+  <p:cSld>
+    <p:spTree>
+      <p:nvGrpSpPr>
+        <p:cNvPr id="1" name=""/>
+        <p:cNvGrpSpPr/>
+        <p:nvPr/>
+      </p:nvGrpSpPr>
+      <p:grpSpPr/>
+      <p:sp>
+        <p:nvSpPr>
+          <p:cNvPr id="2" name="TextBox 1"/>
+          <p:cNvSpPr txBox="1"/>
+          <p:nvPr/>
+        </p:nvSpPr>
+        <p:spPr>
+          <a:xfrm>
+            <a:off x="457200" y="320040"/>
+            <a:ext cx="8229600" cy="822960"/>
+          </a:xfrm>
+          <a:prstGeom prst="rect">
+            <a:avLst/>
+          </a:prstGeom>
+          <a:noFill/>
+        </p:spPr>
+        <p:txBody>
+          <a:bodyPr wrap="square">
+            <a:spAutoFit/>
+          </a:bodyPr>
+          <a:lstStyle/>
+          <a:p>
+            <a:r>
+              <a:rPr sz="2600" b="1">
+                <a:solidFill>
+                  <a:srgbClr val="0B3D2E"/>
+                </a:solidFill>
+              </a:rPr>
+              <a:t>🔗 Referencias</a:t>
+            </a:r>
+          </a:p>
+        </p:txBody>
+      </p:sp>
+      <p:sp>
+        <p:nvSpPr>
+          <p:cNvPr id="3" name="TextBox 2"/>
+          <p:cNvSpPr txBox="1"/>
+          <p:nvPr/>
+        </p:nvSpPr>
+        <p:spPr>
+          <a:xfrm>
+            <a:off x="457200" y="1280160"/>
+            <a:ext cx="8229600" cy="4937760"/>
+          </a:xfrm>
+          <a:prstGeom prst="rect">
+            <a:avLst/>
+          </a:prstGeom>
+          <a:noFill/>
+        </p:spPr>
+        <p:txBody>
+          <a:bodyPr wrap="square">
+            <a:spAutoFit/>
+          </a:bodyPr>
+          <a:lstStyle/>
+          <a:p>
+            <a:pPr>
+              <a:spcAft>
+                <a:spcPts val="600"/>
+              </a:spcAft>
+            </a:pPr>
+            <a:r>
+              <a:rPr sz="1500">
+                <a:solidFill>
+                  <a:srgbClr val="22282E"/>
+                </a:solidFill>
+              </a:rPr>
               <a:t>•  Bazzell, M. Open Source Intelligence Techniques. &lt;https://inteltechniques.com/book1.html&gt;</a:t>
             </a:r>
           </a:p>
@@ -3764,6 +4260,81 @@
           </a:p>
         </p:txBody>
       </p:sp>
+    </p:spTree>
+  </p:cSld>
+  <p:clrMapOvr>
+    <a:masterClrMapping/>
+  </p:clrMapOvr>
+</p:sld>
+</file>
+
+<file path=ppt/slides/slide17.xml><?xml version="1.0" encoding="utf-8"?>
+<p:sld xmlns:a="http://schemas.openxmlformats.org/drawingml/2006/main" xmlns:p="http://schemas.openxmlformats.org/presentationml/2006/main" xmlns:r="http://schemas.openxmlformats.org/officeDocument/2006/relationships">
+  <p:cSld>
+    <p:spTree>
+      <p:nvGrpSpPr>
+        <p:cNvPr id="1" name=""/>
+        <p:cNvGrpSpPr/>
+        <p:nvPr/>
+      </p:nvGrpSpPr>
+      <p:grpSpPr/>
+      <p:sp>
+        <p:nvSpPr>
+          <p:cNvPr id="2" name="TextBox 1"/>
+          <p:cNvSpPr txBox="1"/>
+          <p:nvPr/>
+        </p:nvSpPr>
+        <p:spPr>
+          <a:xfrm>
+            <a:off x="457200" y="274320"/>
+            <a:ext cx="8229600" cy="640080"/>
+          </a:xfrm>
+          <a:prstGeom prst="rect">
+            <a:avLst/>
+          </a:prstGeom>
+          <a:noFill/>
+        </p:spPr>
+        <p:txBody>
+          <a:bodyPr wrap="square">
+            <a:spAutoFit/>
+          </a:bodyPr>
+          <a:lstStyle/>
+          <a:p>
+            <a:r>
+              <a:rPr sz="2200" b="1">
+                <a:solidFill>
+                  <a:srgbClr val="0B3D2E"/>
+                </a:solidFill>
+              </a:rPr>
+              <a:t>Diagrama de la clase</a:t>
+            </a:r>
+          </a:p>
+        </p:txBody>
+      </p:sp>
+      <p:pic>
+        <p:nvPicPr>
+          <p:cNvPr id="3" name="Picture 2" descr="26878036224511c1.png"/>
+          <p:cNvPicPr>
+            <a:picLocks noChangeAspect="1"/>
+          </p:cNvPicPr>
+          <p:nvPr/>
+        </p:nvPicPr>
+        <p:blipFill>
+          <a:blip r:embed="rId2"/>
+          <a:stretch>
+            <a:fillRect/>
+          </a:stretch>
+        </p:blipFill>
+        <p:spPr>
+          <a:xfrm>
+            <a:off x="3033515" y="1097280"/>
+            <a:ext cx="3076969" cy="5303520"/>
+          </a:xfrm>
+          <a:prstGeom prst="rect">
+            <a:avLst/>
+          </a:prstGeom>
+        </p:spPr>
+      </p:pic>
     </p:spTree>
   </p:cSld>
   <p:clrMapOvr>
@@ -4176,7 +4747,7 @@
                   <a:srgbClr val="22282E"/>
                 </a:solidFill>
               </a:rPr>
-              <a:t>•  Redactar un dossier con cadena de custodia y respeto a la privacidad.</a:t>
+              <a:t>•  Redactar un informe mínimo con procedencia, confianza y respeto a la privacidad, sin convertirlo en un dossier intrusivo.</a:t>
             </a:r>
           </a:p>
         </p:txBody>
@@ -4406,7 +4977,7 @@
                   <a:srgbClr val="0B3D2E"/>
                 </a:solidFill>
               </a:rPr>
-              <a:t>📖 Definiciones y características</a:t>
+              <a:t>🧠 Explicación en profundidad</a:t>
             </a:r>
           </a:p>
         </p:txBody>
@@ -4444,82 +5015,82 @@
                   <a:srgbClr val="22282E"/>
                 </a:solidFill>
               </a:rPr>
-              <a:t>•  Pivoteo: usar un dato hallado para descubrir otros (correo → usuario → perfiles). Característica: es la esencia del OSINT de personas.</a:t>
-            </a:r>
-          </a:p>
-          <a:p>
-            <a:pPr>
-              <a:spcAft>
-                <a:spcPts val="600"/>
-              </a:spcAft>
-            </a:pPr>
-            <a:r>
-              <a:rPr sz="1500">
-                <a:solidFill>
-                  <a:srgbClr val="22282E"/>
-                </a:solidFill>
-              </a:rPr>
-              <a:t>•  Enumeración de correos: confirmar si una dirección existe/está registrada en un servicio. Característica: pasiva si usa APIs públicas de recuperación.</a:t>
-            </a:r>
-          </a:p>
-          <a:p>
-            <a:pPr>
-              <a:spcAft>
-                <a:spcPts val="600"/>
-              </a:spcAft>
-            </a:pPr>
-            <a:r>
-              <a:rPr sz="1500">
-                <a:solidFill>
-                  <a:srgbClr val="22282E"/>
-                </a:solidFill>
-              </a:rPr>
-              <a:t>•  Reutilización de alias: tendencia de las personas a repetir el mismo nombre de usuario. Característica: alta tasa de éxito para correlacionar.</a:t>
-            </a:r>
-          </a:p>
-          <a:p>
-            <a:pPr>
-              <a:spcAft>
-                <a:spcPts val="600"/>
-              </a:spcAft>
-            </a:pPr>
-            <a:r>
-              <a:rPr sz="1500">
-                <a:solidFill>
-                  <a:srgbClr val="22282E"/>
-                </a:solidFill>
-              </a:rPr>
-              <a:t>•  Homónimo: dos personas con el mismo nombre. Característica: principal fuente de falso positivo.</a:t>
-            </a:r>
-          </a:p>
-          <a:p>
-            <a:pPr>
-              <a:spcAft>
-                <a:spcPts val="600"/>
-              </a:spcAft>
-            </a:pPr>
-            <a:r>
-              <a:rPr sz="1500">
-                <a:solidFill>
-                  <a:srgbClr val="22282E"/>
-                </a:solidFill>
-              </a:rPr>
-              <a:t>•  Data breach / leak: conjunto de credenciales expuestas por una brecha. Característica: útil para patrones, pero de manejo legal delicado.</a:t>
-            </a:r>
-          </a:p>
-          <a:p>
-            <a:pPr>
-              <a:spcAft>
-                <a:spcPts val="600"/>
-              </a:spcAft>
-            </a:pPr>
-            <a:r>
-              <a:rPr sz="1500">
-                <a:solidFill>
-                  <a:srgbClr val="22282E"/>
-                </a:solidFill>
-              </a:rPr>
-              <a:t>•  Confianza (alta/media/baja): grado de certeza de que un dato pertenece al objetivo. Característica: obliga a la verificación cruzada.</a:t>
+              <a:t>•  Investigar a una persona no consiste en unir perfiles porque comparten un nombre. La resolución de entidades compara atributos —alias, trayectoria, ubicación aproximada, fechas, relaciones y estilo…</a:t>
+            </a:r>
+          </a:p>
+          <a:p>
+            <a:pPr>
+              <a:spcAft>
+                <a:spcPts val="600"/>
+              </a:spcAft>
+            </a:pPr>
+            <a:r>
+              <a:rPr sz="1500">
+                <a:solidFill>
+                  <a:srgbClr val="22282E"/>
+                </a:solidFill>
+              </a:rPr>
+              <a:t>•  El diagrama obliga a formular una hipótesis refutable. Si dos cuentas publican simultáneamente desde lugares incompatibles o muestran carreras distintas, la contradicción pesa. Si ambas usan la misma…</a:t>
+            </a:r>
+          </a:p>
+          <a:p>
+            <a:pPr>
+              <a:spcAft>
+                <a:spcPts val="600"/>
+              </a:spcAft>
+            </a:pPr>
+            <a:r>
+              <a:rPr sz="1500">
+                <a:solidFill>
+                  <a:srgbClr val="22282E"/>
+                </a:solidFill>
+              </a:rPr>
+              <a:t>•  Una revisión de exposición propia, una investigación periodística con garantías o una debida diligencia autorizada tienen propósitos diferentes. Antes de buscar se documentan base legítima…</a:t>
+            </a:r>
+          </a:p>
+          <a:p>
+            <a:pPr>
+              <a:spcAft>
+                <a:spcPts val="600"/>
+              </a:spcAft>
+            </a:pPr>
+            <a:r>
+              <a:rPr sz="1500">
+                <a:solidFill>
+                  <a:srgbClr val="22282E"/>
+                </a:solidFill>
+              </a:rPr>
+              <a:t>•  Los datos de filtraciones requieren un tratamiento especial. Un servicio defensivo puede permitir comprobar si un identificador propio aparece comprometido sin revelar contraseñas. Descargar o…</a:t>
+            </a:r>
+          </a:p>
+          <a:p>
+            <a:pPr>
+              <a:spcAft>
+                <a:spcPts val="600"/>
+              </a:spcAft>
+            </a:pPr>
+            <a:r>
+              <a:rPr sz="1500">
+                <a:solidFill>
+                  <a:srgbClr val="22282E"/>
+                </a:solidFill>
+              </a:rPr>
+              <a:t>•  Las fechas de creación, empleo y publicación pueden ordenar hechos, pero las plataformas cambian zona horaria, permiten editar y muestran fechas incompletas. Se conserva el valor original y la…</a:t>
+            </a:r>
+          </a:p>
+          <a:p>
+            <a:pPr>
+              <a:spcAft>
+                <a:spcPts val="600"/>
+              </a:spcAft>
+            </a:pPr>
+            <a:r>
+              <a:rPr sz="1500">
+                <a:solidFill>
+                  <a:srgbClr val="22282E"/>
+                </a:solidFill>
+              </a:rPr>
+              <a:t>•  Un analista encuentra un proceso judicial asociado al nombre de un candidato. La ciudad coincide, pero el segundo apellido y la edad no. En lugar de elevarlo como hallazgo, trata el resultado como…</a:t>
             </a:r>
           </a:p>
         </p:txBody>
@@ -4570,7 +5141,7 @@
                   <a:srgbClr val="0B3D2E"/>
                 </a:solidFill>
               </a:rPr>
-              <a:t>🧰 Herramientas y preparación</a:t>
+              <a:t>📔 Glosario operativo</a:t>
             </a:r>
           </a:p>
         </p:txBody>
@@ -4608,67 +5179,82 @@
                   <a:srgbClr val="22282E"/>
                 </a:solidFill>
               </a:rPr>
-              <a:t>•  VM aislada y sock puppet ya preparados (Clase 249).</a:t>
-            </a:r>
-          </a:p>
-          <a:p>
-            <a:pPr>
-              <a:spcAft>
-                <a:spcPts val="600"/>
-              </a:spcAft>
-            </a:pPr>
-            <a:r>
-              <a:rPr sz="1500">
-                <a:solidFill>
-                  <a:srgbClr val="22282E"/>
-                </a:solidFill>
-              </a:rPr>
-              <a:t>•  Búsqueda de usuarios: sherlock, maigret, whatsmyname. Instalación: pipx install maigret.</a:t>
-            </a:r>
-          </a:p>
-          <a:p>
-            <a:pPr>
-              <a:spcAft>
-                <a:spcPts val="600"/>
-              </a:spcAft>
-            </a:pPr>
-            <a:r>
-              <a:rPr sz="1500">
-                <a:solidFill>
-                  <a:srgbClr val="22282E"/>
-                </a:solidFill>
-              </a:rPr>
-              <a:t>•  Correos: Have I Been Pwned, Holehe (pipx install holehe), Hunter.io (con moderación).</a:t>
-            </a:r>
-          </a:p>
-          <a:p>
-            <a:pPr>
-              <a:spcAft>
-                <a:spcPts val="600"/>
-              </a:spcAft>
-            </a:pPr>
-            <a:r>
-              <a:rPr sz="1500">
-                <a:solidFill>
-                  <a:srgbClr val="22282E"/>
-                </a:solidFill>
-              </a:rPr>
-              <a:t>•  Buscadores de personas: solo de acceso público y legal según jurisdicción; documenta la fuente.</a:t>
-            </a:r>
-          </a:p>
-          <a:p>
-            <a:pPr>
-              <a:spcAft>
-                <a:spcPts val="600"/>
-              </a:spcAft>
-            </a:pPr>
-            <a:r>
-              <a:rPr sz="1500">
-                <a:solidFill>
-                  <a:srgbClr val="22282E"/>
-                </a:solidFill>
-              </a:rPr>
-              <a:t>•  Recordatorio: ejecuta cada herramienta contra tu propio identificador o el autorizado.</a:t>
+              <a:t>•  Término — Definición útil</a:t>
+            </a:r>
+          </a:p>
+          <a:p>
+            <a:pPr>
+              <a:spcAft>
+                <a:spcPts val="600"/>
+              </a:spcAft>
+            </a:pPr>
+            <a:r>
+              <a:rPr sz="1500">
+                <a:solidFill>
+                  <a:srgbClr val="22282E"/>
+                </a:solidFill>
+              </a:rPr>
+              <a:t>•  Resolución de entidades — Evaluación de si registros distintos representan al mismo sujeto.</a:t>
+            </a:r>
+          </a:p>
+          <a:p>
+            <a:pPr>
+              <a:spcAft>
+                <a:spcPts val="600"/>
+              </a:spcAft>
+            </a:pPr>
+            <a:r>
+              <a:rPr sz="1500">
+                <a:solidFill>
+                  <a:srgbClr val="22282E"/>
+                </a:solidFill>
+              </a:rPr>
+              <a:t>•  Homónimo — Persona diferente que comparte nombre u otro atributo.</a:t>
+            </a:r>
+          </a:p>
+          <a:p>
+            <a:pPr>
+              <a:spcAft>
+                <a:spcPts val="600"/>
+              </a:spcAft>
+            </a:pPr>
+            <a:r>
+              <a:rPr sz="1500">
+                <a:solidFill>
+                  <a:srgbClr val="22282E"/>
+                </a:solidFill>
+              </a:rPr>
+              <a:t>•  Identificador — Atributo usado para relacionar registros, con fuerza y riesgo variables.</a:t>
+            </a:r>
+          </a:p>
+          <a:p>
+            <a:pPr>
+              <a:spcAft>
+                <a:spcPts val="600"/>
+              </a:spcAft>
+            </a:pPr>
+            <a:r>
+              <a:rPr sz="1500">
+                <a:solidFill>
+                  <a:srgbClr val="22282E"/>
+                </a:solidFill>
+              </a:rPr>
+              <a:t>•  Minimización — Recopilar y conservar solo lo necesario para el propósito declarado.</a:t>
+            </a:r>
+          </a:p>
+          <a:p>
+            <a:pPr>
+              <a:spcAft>
+                <a:spcPts val="600"/>
+              </a:spcAft>
+            </a:pPr>
+            <a:r>
+              <a:rPr sz="1500">
+                <a:solidFill>
+                  <a:srgbClr val="22282E"/>
+                </a:solidFill>
+              </a:rPr>
+              <a:t>•  Contradicción — Evidencia que reduce la plausibilidad de una hipótesis de identidad.</a:t>
             </a:r>
           </a:p>
         </p:txBody>
@@ -4719,7 +5305,7 @@
                   <a:srgbClr val="0B3D2E"/>
                 </a:solidFill>
               </a:rPr>
-              <a:t>🧪 Laboratorio guiado</a:t>
+              <a:t>✅ Criterio de dominio</a:t>
             </a:r>
           </a:p>
         </p:txBody>
@@ -4757,97 +5343,7 @@
                   <a:srgbClr val="22282E"/>
                 </a:solidFill>
               </a:rPr>
-              <a:t>•  Objetivo: tu propio identificador (o el de un compañero que consienta).</a:t>
-            </a:r>
-          </a:p>
-          <a:p>
-            <a:pPr>
-              <a:spcAft>
-                <a:spcPts val="600"/>
-              </a:spcAft>
-            </a:pPr>
-            <a:r>
-              <a:rPr sz="1500">
-                <a:solidFill>
-                  <a:srgbClr val="22282E"/>
-                </a:solidFill>
-              </a:rPr>
-              <a:t>•  Anota tus identificadores de prueba: nombre, un correo dedicado, un alias.</a:t>
-            </a:r>
-          </a:p>
-          <a:p>
-            <a:pPr>
-              <a:spcAft>
-                <a:spcPts val="600"/>
-              </a:spcAft>
-            </a:pPr>
-            <a:r>
-              <a:rPr sz="1500">
-                <a:solidFill>
-                  <a:srgbClr val="22282E"/>
-                </a:solidFill>
-              </a:rPr>
-              <a:t>•  Busca el alias en múltiples plataformas: sherlock tualias y maigret tualias. Registra coincidencias reales vs. falsos positivos.</a:t>
-            </a:r>
-          </a:p>
-          <a:p>
-            <a:pPr>
-              <a:spcAft>
-                <a:spcPts val="600"/>
-              </a:spcAft>
-            </a:pPr>
-            <a:r>
-              <a:rPr sz="1500">
-                <a:solidFill>
-                  <a:srgbClr val="22282E"/>
-                </a:solidFill>
-              </a:rPr>
-              <a:t>•  Comprueba en qué servicios está registrado un correo: holehe correo@example.com.</a:t>
-            </a:r>
-          </a:p>
-          <a:p>
-            <a:pPr>
-              <a:spcAft>
-                <a:spcPts val="600"/>
-              </a:spcAft>
-            </a:pPr>
-            <a:r>
-              <a:rPr sz="1500">
-                <a:solidFill>
-                  <a:srgbClr val="22282E"/>
-                </a:solidFill>
-              </a:rPr>
-              <a:t>•  Consulta brechas asociadas al correo en Have I Been Pwned y anota qué datos se filtraron.</a:t>
-            </a:r>
-          </a:p>
-          <a:p>
-            <a:pPr>
-              <a:spcAft>
-                <a:spcPts val="600"/>
-              </a:spcAft>
-            </a:pPr>
-            <a:r>
-              <a:rPr sz="1500">
-                <a:solidFill>
-                  <a:srgbClr val="22282E"/>
-                </a:solidFill>
-              </a:rPr>
-              <a:t>•  Pivota: si un perfil revela una web personal, extrae de ella nuevos correos o alias y repite.</a:t>
-            </a:r>
-          </a:p>
-          <a:p>
-            <a:pPr>
-              <a:spcAft>
-                <a:spcPts val="600"/>
-              </a:spcAft>
-            </a:pPr>
-            <a:r>
-              <a:rPr sz="1500">
-                <a:solidFill>
-                  <a:srgbClr val="22282E"/>
-                </a:solidFill>
-              </a:rPr>
-              <a:t>•  Construye una tabla de correlación (dato, fuente, confianza, verificado sí/no).</a:t>
+              <a:t>•  Hay dominio cuando el alumno puede resolver una identidad propia o ficticia con criterios positivos y negativos, mantener hipótesis alternativas, explicar la base y los límites de la búsqueda y…</a:t>
             </a:r>
           </a:p>
         </p:txBody>
@@ -4898,7 +5394,7 @@
                   <a:srgbClr val="0B3D2E"/>
                 </a:solidFill>
               </a:rPr>
-              <a:t>✍️ Ejercicios</a:t>
+              <a:t>📖 Definiciones y características</a:t>
             </a:r>
           </a:p>
         </p:txBody>
@@ -4936,82 +5432,82 @@
                   <a:srgbClr val="22282E"/>
                 </a:solidFill>
               </a:rPr>
-              <a:t>•  Ejecuta sherlock y maigret sobre el mismo alias y compara falsos positivos.</a:t>
-            </a:r>
-          </a:p>
-          <a:p>
-            <a:pPr>
-              <a:spcAft>
-                <a:spcPts val="600"/>
-              </a:spcAft>
-            </a:pPr>
-            <a:r>
-              <a:rPr sz="1500">
-                <a:solidFill>
-                  <a:srgbClr val="22282E"/>
-                </a:solidFill>
-              </a:rPr>
-              <a:t>•  Explica por qué un "match" de usuario no prueba que sea la misma persona.</a:t>
-            </a:r>
-          </a:p>
-          <a:p>
-            <a:pPr>
-              <a:spcAft>
-                <a:spcPts val="600"/>
-              </a:spcAft>
-            </a:pPr>
-            <a:r>
-              <a:rPr sz="1500">
-                <a:solidFill>
-                  <a:srgbClr val="22282E"/>
-                </a:solidFill>
-              </a:rPr>
-              <a:t>•  Documenta una cadena de pivoteo de al menos 3 saltos (correo → perfil → web → correo nuevo).</a:t>
-            </a:r>
-          </a:p>
-          <a:p>
-            <a:pPr>
-              <a:spcAft>
-                <a:spcPts val="600"/>
-              </a:spcAft>
-            </a:pPr>
-            <a:r>
-              <a:rPr sz="1500">
-                <a:solidFill>
-                  <a:srgbClr val="22282E"/>
-                </a:solidFill>
-              </a:rPr>
-              <a:t>•  Analiza una brecha propia en HIBP y deriva 3 recomendaciones de higiene de credenciales.</a:t>
-            </a:r>
-          </a:p>
-          <a:p>
-            <a:pPr>
-              <a:spcAft>
-                <a:spcPts val="600"/>
-              </a:spcAft>
-            </a:pPr>
-            <a:r>
-              <a:rPr sz="1500">
-                <a:solidFill>
-                  <a:srgbClr val="22282E"/>
-                </a:solidFill>
-              </a:rPr>
-              <a:t>•  Diseña criterios objetivos para descartar homónimos.</a:t>
-            </a:r>
-          </a:p>
-          <a:p>
-            <a:pPr>
-              <a:spcAft>
-                <a:spcPts val="600"/>
-              </a:spcAft>
-            </a:pPr>
-            <a:r>
-              <a:rPr sz="1500">
-                <a:solidFill>
-                  <a:srgbClr val="22282E"/>
-                </a:solidFill>
-              </a:rPr>
-              <a:t>•  Investiga la diferencia legal entre OSINT autorizado y doxing en tu país.</a:t>
+              <a:t>•  Pivoteo: usar un dato hallado para descubrir otros (correo → usuario → perfiles). Característica: es la esencia del OSINT de personas.</a:t>
+            </a:r>
+          </a:p>
+          <a:p>
+            <a:pPr>
+              <a:spcAft>
+                <a:spcPts val="600"/>
+              </a:spcAft>
+            </a:pPr>
+            <a:r>
+              <a:rPr sz="1500">
+                <a:solidFill>
+                  <a:srgbClr val="22282E"/>
+                </a:solidFill>
+              </a:rPr>
+              <a:t>•  Enumeración de correos: confirmar si una dirección existe/está registrada en un servicio. Característica: pasiva si usa APIs públicas de recuperación.</a:t>
+            </a:r>
+          </a:p>
+          <a:p>
+            <a:pPr>
+              <a:spcAft>
+                <a:spcPts val="600"/>
+              </a:spcAft>
+            </a:pPr>
+            <a:r>
+              <a:rPr sz="1500">
+                <a:solidFill>
+                  <a:srgbClr val="22282E"/>
+                </a:solidFill>
+              </a:rPr>
+              <a:t>•  Reutilización de alias: tendencia de las personas a repetir el mismo nombre de usuario. Característica: alta tasa de éxito para correlacionar.</a:t>
+            </a:r>
+          </a:p>
+          <a:p>
+            <a:pPr>
+              <a:spcAft>
+                <a:spcPts val="600"/>
+              </a:spcAft>
+            </a:pPr>
+            <a:r>
+              <a:rPr sz="1500">
+                <a:solidFill>
+                  <a:srgbClr val="22282E"/>
+                </a:solidFill>
+              </a:rPr>
+              <a:t>•  Homónimo: dos personas con el mismo nombre. Característica: principal fuente de falso positivo.</a:t>
+            </a:r>
+          </a:p>
+          <a:p>
+            <a:pPr>
+              <a:spcAft>
+                <a:spcPts val="600"/>
+              </a:spcAft>
+            </a:pPr>
+            <a:r>
+              <a:rPr sz="1500">
+                <a:solidFill>
+                  <a:srgbClr val="22282E"/>
+                </a:solidFill>
+              </a:rPr>
+              <a:t>•  Data breach / leak: conjunto de credenciales expuestas por una brecha. Característica: útil para patrones, pero de manejo legal delicado.</a:t>
+            </a:r>
+          </a:p>
+          <a:p>
+            <a:pPr>
+              <a:spcAft>
+                <a:spcPts val="600"/>
+              </a:spcAft>
+            </a:pPr>
+            <a:r>
+              <a:rPr sz="1500">
+                <a:solidFill>
+                  <a:srgbClr val="22282E"/>
+                </a:solidFill>
+              </a:rPr>
+              <a:t>•  Confianza (alta/media/baja): grado de certeza de que un dato pertenece al objetivo. Característica: obliga a la verificación cruzada.</a:t>
             </a:r>
           </a:p>
         </p:txBody>
